--- a/livro_ia_educacao/saida/pptx/Cap11_slides.pptx
+++ b/livro_ia_educacao/saida/pptx/Cap11_slides.pptx
@@ -10795,11 +10795,11 @@
         <p:spPr>
           <a:xfrm>
             <a:off x="548640" y="1417320"/>
-            <a:ext cx="11064240" cy="762000"/>
+            <a:ext cx="11064240" cy="682752"/>
           </a:xfrm>
           <a:prstGeom prst="roundRect">
             <a:avLst>
-              <a:gd name="adj" fmla="val 14400"/>
+              <a:gd name="adj" fmla="val 16071"/>
             </a:avLst>
           </a:prstGeom>
           <a:solidFill>
@@ -10826,7 +10826,7 @@
         <p:spPr>
           <a:xfrm>
             <a:off x="731520" y="1417320"/>
-            <a:ext cx="548640" cy="762000"/>
+            <a:ext cx="548640" cy="682752"/>
           </a:xfrm>
           <a:prstGeom prst="rect">
             <a:avLst/>
@@ -10862,7 +10862,7 @@
         <p:spPr>
           <a:xfrm>
             <a:off x="1463040" y="1417320"/>
-            <a:ext cx="9966960" cy="762000"/>
+            <a:ext cx="9966960" cy="682752"/>
           </a:xfrm>
           <a:prstGeom prst="rect">
             <a:avLst/>
@@ -10897,12 +10897,12 @@
         </p:nvSpPr>
         <p:spPr>
           <a:xfrm>
-            <a:off x="548640" y="2289048"/>
-            <a:ext cx="11064240" cy="762000"/>
+            <a:off x="548640" y="2209800"/>
+            <a:ext cx="11064240" cy="682752"/>
           </a:xfrm>
           <a:prstGeom prst="roundRect">
             <a:avLst>
-              <a:gd name="adj" fmla="val 14400"/>
+              <a:gd name="adj" fmla="val 16071"/>
             </a:avLst>
           </a:prstGeom>
           <a:solidFill>
@@ -10928,8 +10928,8 @@
         </p:nvSpPr>
         <p:spPr>
           <a:xfrm>
-            <a:off x="731520" y="2289048"/>
-            <a:ext cx="548640" cy="762000"/>
+            <a:off x="731520" y="2209800"/>
+            <a:ext cx="548640" cy="682752"/>
           </a:xfrm>
           <a:prstGeom prst="rect">
             <a:avLst/>
@@ -10964,8 +10964,8 @@
         </p:nvSpPr>
         <p:spPr>
           <a:xfrm>
-            <a:off x="1463040" y="2289048"/>
-            <a:ext cx="9966960" cy="762000"/>
+            <a:off x="1463040" y="2209800"/>
+            <a:ext cx="9966960" cy="682752"/>
           </a:xfrm>
           <a:prstGeom prst="rect">
             <a:avLst/>
@@ -11000,12 +11000,12 @@
         </p:nvSpPr>
         <p:spPr>
           <a:xfrm>
-            <a:off x="548640" y="3160776"/>
-            <a:ext cx="11064240" cy="762000"/>
+            <a:off x="548640" y="3002280"/>
+            <a:ext cx="11064240" cy="682752"/>
           </a:xfrm>
           <a:prstGeom prst="roundRect">
             <a:avLst>
-              <a:gd name="adj" fmla="val 14400"/>
+              <a:gd name="adj" fmla="val 16071"/>
             </a:avLst>
           </a:prstGeom>
           <a:solidFill>
@@ -11031,8 +11031,8 @@
         </p:nvSpPr>
         <p:spPr>
           <a:xfrm>
-            <a:off x="731520" y="3160776"/>
-            <a:ext cx="548640" cy="762000"/>
+            <a:off x="731520" y="3002280"/>
+            <a:ext cx="548640" cy="682752"/>
           </a:xfrm>
           <a:prstGeom prst="rect">
             <a:avLst/>
@@ -11067,8 +11067,8 @@
         </p:nvSpPr>
         <p:spPr>
           <a:xfrm>
-            <a:off x="1463040" y="3160776"/>
-            <a:ext cx="9966960" cy="762000"/>
+            <a:off x="1463040" y="3002280"/>
+            <a:ext cx="9966960" cy="682752"/>
           </a:xfrm>
           <a:prstGeom prst="rect">
             <a:avLst/>
@@ -11103,12 +11103,12 @@
         </p:nvSpPr>
         <p:spPr>
           <a:xfrm>
-            <a:off x="548640" y="4032504"/>
-            <a:ext cx="11064240" cy="762000"/>
+            <a:off x="548640" y="3794760"/>
+            <a:ext cx="11064240" cy="682752"/>
           </a:xfrm>
           <a:prstGeom prst="roundRect">
             <a:avLst>
-              <a:gd name="adj" fmla="val 14400"/>
+              <a:gd name="adj" fmla="val 16071"/>
             </a:avLst>
           </a:prstGeom>
           <a:solidFill>
@@ -11134,8 +11134,8 @@
         </p:nvSpPr>
         <p:spPr>
           <a:xfrm>
-            <a:off x="731520" y="4032504"/>
-            <a:ext cx="548640" cy="762000"/>
+            <a:off x="731520" y="3794760"/>
+            <a:ext cx="548640" cy="682752"/>
           </a:xfrm>
           <a:prstGeom prst="rect">
             <a:avLst/>
@@ -11170,8 +11170,8 @@
         </p:nvSpPr>
         <p:spPr>
           <a:xfrm>
-            <a:off x="1463040" y="4032504"/>
-            <a:ext cx="9966960" cy="762000"/>
+            <a:off x="1463040" y="3794760"/>
+            <a:ext cx="9966960" cy="682752"/>
           </a:xfrm>
           <a:prstGeom prst="rect">
             <a:avLst/>
@@ -11206,12 +11206,12 @@
         </p:nvSpPr>
         <p:spPr>
           <a:xfrm>
-            <a:off x="548640" y="4904232"/>
-            <a:ext cx="11064240" cy="762000"/>
+            <a:off x="548640" y="4587240"/>
+            <a:ext cx="11064240" cy="682752"/>
           </a:xfrm>
           <a:prstGeom prst="roundRect">
             <a:avLst>
-              <a:gd name="adj" fmla="val 14400"/>
+              <a:gd name="adj" fmla="val 16071"/>
             </a:avLst>
           </a:prstGeom>
           <a:solidFill>
@@ -11237,8 +11237,8 @@
         </p:nvSpPr>
         <p:spPr>
           <a:xfrm>
-            <a:off x="731520" y="4904232"/>
-            <a:ext cx="548640" cy="762000"/>
+            <a:off x="731520" y="4587240"/>
+            <a:ext cx="548640" cy="682752"/>
           </a:xfrm>
           <a:prstGeom prst="rect">
             <a:avLst/>
@@ -11273,8 +11273,8 @@
         </p:nvSpPr>
         <p:spPr>
           <a:xfrm>
-            <a:off x="1463040" y="4904232"/>
-            <a:ext cx="9966960" cy="762000"/>
+            <a:off x="1463040" y="4587240"/>
+            <a:ext cx="9966960" cy="682752"/>
           </a:xfrm>
           <a:prstGeom prst="rect">
             <a:avLst/>
@@ -11309,12 +11309,12 @@
         </p:nvSpPr>
         <p:spPr>
           <a:xfrm>
-            <a:off x="548640" y="5775960"/>
-            <a:ext cx="11064240" cy="762000"/>
+            <a:off x="548640" y="5379720"/>
+            <a:ext cx="11064240" cy="682752"/>
           </a:xfrm>
           <a:prstGeom prst="roundRect">
             <a:avLst>
-              <a:gd name="adj" fmla="val 14400"/>
+              <a:gd name="adj" fmla="val 16071"/>
             </a:avLst>
           </a:prstGeom>
           <a:solidFill>
@@ -11340,8 +11340,8 @@
         </p:nvSpPr>
         <p:spPr>
           <a:xfrm>
-            <a:off x="731520" y="5775960"/>
-            <a:ext cx="548640" cy="762000"/>
+            <a:off x="731520" y="5379720"/>
+            <a:ext cx="548640" cy="682752"/>
           </a:xfrm>
           <a:prstGeom prst="rect">
             <a:avLst/>
@@ -11376,8 +11376,8 @@
         </p:nvSpPr>
         <p:spPr>
           <a:xfrm>
-            <a:off x="1463040" y="5775960"/>
-            <a:ext cx="9966960" cy="762000"/>
+            <a:off x="1463040" y="5379720"/>
+            <a:ext cx="9966960" cy="682752"/>
           </a:xfrm>
           <a:prstGeom prst="rect">
             <a:avLst/>
